--- a/FindCare/architectureAndDesign/UX Deck with screen shots and instructions.pptx
+++ b/FindCare/architectureAndDesign/UX Deck with screen shots and instructions.pptx
@@ -8,6 +8,7 @@
     <p:sldId id="256" r:id="rId2"/>
     <p:sldId id="257" r:id="rId3"/>
     <p:sldId id="258" r:id="rId4"/>
+    <p:sldId id="259" r:id="rId5"/>
   </p:sldIdLst>
   <p:sldSz cx="12192000" cy="6858000"/>
   <p:notesSz cx="6858000" cy="9144000"/>
@@ -106,6 +107,11 @@
       </a:defRPr>
     </a:lvl9pPr>
   </p:defaultTextStyle>
+  <p:extLst>
+    <p:ext uri="{EFAFB233-063F-42B5-8137-9DF3F51BA10A}">
+      <p15:sldGuideLst xmlns:p15="http://schemas.microsoft.com/office/powerpoint/2012/main"/>
+    </p:ext>
+  </p:extLst>
 </p:presentation>
 </file>
 
@@ -256,7 +262,7 @@
           <a:p>
             <a:fld id="{49295517-FB92-41E2-93A4-7F972A41B115}" type="datetimeFigureOut">
               <a:rPr lang="en-US" smtClean="0"/>
-              <a:t>9/3/2026</a:t>
+              <a:t>9/9/2026</a:t>
             </a:fld>
             <a:endParaRPr lang="en-US"/>
           </a:p>
@@ -454,7 +460,7 @@
           <a:p>
             <a:fld id="{49295517-FB92-41E2-93A4-7F972A41B115}" type="datetimeFigureOut">
               <a:rPr lang="en-US" smtClean="0"/>
-              <a:t>9/3/2026</a:t>
+              <a:t>9/9/2026</a:t>
             </a:fld>
             <a:endParaRPr lang="en-US"/>
           </a:p>
@@ -662,7 +668,7 @@
           <a:p>
             <a:fld id="{49295517-FB92-41E2-93A4-7F972A41B115}" type="datetimeFigureOut">
               <a:rPr lang="en-US" smtClean="0"/>
-              <a:t>9/3/2026</a:t>
+              <a:t>9/9/2026</a:t>
             </a:fld>
             <a:endParaRPr lang="en-US"/>
           </a:p>
@@ -860,7 +866,7 @@
           <a:p>
             <a:fld id="{49295517-FB92-41E2-93A4-7F972A41B115}" type="datetimeFigureOut">
               <a:rPr lang="en-US" smtClean="0"/>
-              <a:t>9/3/2026</a:t>
+              <a:t>9/9/2026</a:t>
             </a:fld>
             <a:endParaRPr lang="en-US"/>
           </a:p>
@@ -1135,7 +1141,7 @@
           <a:p>
             <a:fld id="{49295517-FB92-41E2-93A4-7F972A41B115}" type="datetimeFigureOut">
               <a:rPr lang="en-US" smtClean="0"/>
-              <a:t>9/3/2026</a:t>
+              <a:t>9/9/2026</a:t>
             </a:fld>
             <a:endParaRPr lang="en-US"/>
           </a:p>
@@ -1400,7 +1406,7 @@
           <a:p>
             <a:fld id="{49295517-FB92-41E2-93A4-7F972A41B115}" type="datetimeFigureOut">
               <a:rPr lang="en-US" smtClean="0"/>
-              <a:t>9/3/2026</a:t>
+              <a:t>9/9/2026</a:t>
             </a:fld>
             <a:endParaRPr lang="en-US"/>
           </a:p>
@@ -1812,7 +1818,7 @@
           <a:p>
             <a:fld id="{49295517-FB92-41E2-93A4-7F972A41B115}" type="datetimeFigureOut">
               <a:rPr lang="en-US" smtClean="0"/>
-              <a:t>9/3/2026</a:t>
+              <a:t>9/9/2026</a:t>
             </a:fld>
             <a:endParaRPr lang="en-US"/>
           </a:p>
@@ -1953,7 +1959,7 @@
           <a:p>
             <a:fld id="{49295517-FB92-41E2-93A4-7F972A41B115}" type="datetimeFigureOut">
               <a:rPr lang="en-US" smtClean="0"/>
-              <a:t>9/3/2026</a:t>
+              <a:t>9/9/2026</a:t>
             </a:fld>
             <a:endParaRPr lang="en-US"/>
           </a:p>
@@ -2066,7 +2072,7 @@
           <a:p>
             <a:fld id="{49295517-FB92-41E2-93A4-7F972A41B115}" type="datetimeFigureOut">
               <a:rPr lang="en-US" smtClean="0"/>
-              <a:t>9/3/2026</a:t>
+              <a:t>9/9/2026</a:t>
             </a:fld>
             <a:endParaRPr lang="en-US"/>
           </a:p>
@@ -2377,7 +2383,7 @@
           <a:p>
             <a:fld id="{49295517-FB92-41E2-93A4-7F972A41B115}" type="datetimeFigureOut">
               <a:rPr lang="en-US" smtClean="0"/>
-              <a:t>9/3/2026</a:t>
+              <a:t>9/9/2026</a:t>
             </a:fld>
             <a:endParaRPr lang="en-US"/>
           </a:p>
@@ -2665,7 +2671,7 @@
           <a:p>
             <a:fld id="{49295517-FB92-41E2-93A4-7F972A41B115}" type="datetimeFigureOut">
               <a:rPr lang="en-US" smtClean="0"/>
-              <a:t>9/3/2026</a:t>
+              <a:t>9/9/2026</a:t>
             </a:fld>
             <a:endParaRPr lang="en-US"/>
           </a:p>
@@ -2906,7 +2912,7 @@
           <a:p>
             <a:fld id="{49295517-FB92-41E2-93A4-7F972A41B115}" type="datetimeFigureOut">
               <a:rPr lang="en-US" smtClean="0"/>
-              <a:t>9/3/2026</a:t>
+              <a:t>9/9/2026</a:t>
             </a:fld>
             <a:endParaRPr lang="en-US"/>
           </a:p>
@@ -4546,6 +4552,595 @@
     <p:extLst>
       <p:ext uri="{BB962C8B-B14F-4D97-AF65-F5344CB8AC3E}">
         <p14:creationId xmlns:p14="http://schemas.microsoft.com/office/powerpoint/2010/main" val="1826095902"/>
+      </p:ext>
+    </p:extLst>
+  </p:cSld>
+  <p:clrMapOvr>
+    <a:masterClrMapping/>
+  </p:clrMapOvr>
+</p:sld>
+</file>
+
+<file path=ppt/slides/slide4.xml><?xml version="1.0" encoding="utf-8"?>
+<p:sld xmlns:a="http://schemas.openxmlformats.org/drawingml/2006/main" xmlns:r="http://schemas.openxmlformats.org/officeDocument/2006/relationships" xmlns:p="http://schemas.openxmlformats.org/presentationml/2006/main">
+  <p:cSld>
+    <p:spTree>
+      <p:nvGrpSpPr>
+        <p:cNvPr id="1" name=""/>
+        <p:cNvGrpSpPr/>
+        <p:nvPr/>
+      </p:nvGrpSpPr>
+      <p:grpSpPr>
+        <a:xfrm>
+          <a:off x="0" y="0"/>
+          <a:ext cx="0" cy="0"/>
+          <a:chOff x="0" y="0"/>
+          <a:chExt cx="0" cy="0"/>
+        </a:xfrm>
+      </p:grpSpPr>
+      <p:pic>
+        <p:nvPicPr>
+          <p:cNvPr id="5" name="Picture 4">
+            <a:extLst>
+              <a:ext uri="{FF2B5EF4-FFF2-40B4-BE49-F238E27FC236}">
+                <a16:creationId xmlns:a16="http://schemas.microsoft.com/office/drawing/2014/main" id="{8C6FD1E4-3AF4-97F2-A769-E74623341AD6}"/>
+              </a:ext>
+            </a:extLst>
+          </p:cNvPr>
+          <p:cNvPicPr>
+            <a:picLocks noChangeAspect="1"/>
+          </p:cNvPicPr>
+          <p:nvPr/>
+        </p:nvPicPr>
+        <p:blipFill>
+          <a:blip r:embed="rId2"/>
+          <a:stretch>
+            <a:fillRect/>
+          </a:stretch>
+        </p:blipFill>
+        <p:spPr>
+          <a:xfrm>
+            <a:off x="1142920" y="1183289"/>
+            <a:ext cx="2333642" cy="3848128"/>
+          </a:xfrm>
+          <a:prstGeom prst="rect">
+            <a:avLst/>
+          </a:prstGeom>
+        </p:spPr>
+      </p:pic>
+      <p:sp>
+        <p:nvSpPr>
+          <p:cNvPr id="6" name="TextBox 5">
+            <a:extLst>
+              <a:ext uri="{FF2B5EF4-FFF2-40B4-BE49-F238E27FC236}">
+                <a16:creationId xmlns:a16="http://schemas.microsoft.com/office/drawing/2014/main" id="{BAD15D03-8E7A-64E3-C363-CDFB24A38317}"/>
+              </a:ext>
+            </a:extLst>
+          </p:cNvPr>
+          <p:cNvSpPr txBox="1"/>
+          <p:nvPr/>
+        </p:nvSpPr>
+        <p:spPr>
+          <a:xfrm>
+            <a:off x="4052768" y="1217668"/>
+            <a:ext cx="2545616" cy="4278094"/>
+          </a:xfrm>
+          <a:prstGeom prst="rect">
+            <a:avLst/>
+          </a:prstGeom>
+          <a:solidFill>
+            <a:schemeClr val="accent4">
+              <a:lumMod val="20000"/>
+              <a:lumOff val="80000"/>
+            </a:schemeClr>
+          </a:solidFill>
+          <a:ln>
+            <a:solidFill>
+              <a:schemeClr val="tx2">
+                <a:lumMod val="10000"/>
+                <a:lumOff val="90000"/>
+              </a:schemeClr>
+            </a:solidFill>
+          </a:ln>
+        </p:spPr>
+        <p:txBody>
+          <a:bodyPr wrap="square" rtlCol="0">
+            <a:spAutoFit/>
+          </a:bodyPr>
+          <a:lstStyle/>
+          <a:p>
+            <a:endParaRPr lang="en-US" sz="1200" dirty="0"/>
+          </a:p>
+          <a:p>
+            <a:r>
+              <a:rPr lang="en-US" sz="1200" dirty="0"/>
+              <a:t>Choose Facility Type</a:t>
+            </a:r>
+          </a:p>
+          <a:p>
+            <a:endParaRPr lang="en-US" sz="1200" dirty="0"/>
+          </a:p>
+          <a:p>
+            <a:r>
+              <a:rPr lang="en-US" sz="800" dirty="0"/>
+              <a:t>All Possible, Ambulatory, In patient, Your choice</a:t>
+            </a:r>
+          </a:p>
+          <a:p>
+            <a:endParaRPr lang="en-US" sz="800" dirty="0"/>
+          </a:p>
+          <a:p>
+            <a:r>
+              <a:rPr lang="en-US" sz="800" dirty="0"/>
+              <a:t>Ambulatory, Psychiatric, Inpatient (check boxes)</a:t>
+            </a:r>
+          </a:p>
+          <a:p>
+            <a:r>
+              <a:rPr lang="en-US" sz="800" dirty="0"/>
+              <a:t>Check all same</a:t>
+            </a:r>
+          </a:p>
+          <a:p>
+            <a:endParaRPr lang="en-US" sz="1200" dirty="0"/>
+          </a:p>
+          <a:p>
+            <a:endParaRPr lang="en-US" sz="1200" dirty="0"/>
+          </a:p>
+          <a:p>
+            <a:endParaRPr lang="en-US" sz="1200" dirty="0"/>
+          </a:p>
+          <a:p>
+            <a:endParaRPr lang="en-US" sz="1200" dirty="0"/>
+          </a:p>
+          <a:p>
+            <a:endParaRPr lang="en-US" sz="1200" dirty="0"/>
+          </a:p>
+          <a:p>
+            <a:r>
+              <a:rPr lang="en-US" sz="1200" dirty="0"/>
+              <a:t>  Same</a:t>
+            </a:r>
+          </a:p>
+          <a:p>
+            <a:endParaRPr lang="en-US" sz="1200" dirty="0"/>
+          </a:p>
+          <a:p>
+            <a:endParaRPr lang="en-US" sz="1200" dirty="0"/>
+          </a:p>
+          <a:p>
+            <a:endParaRPr lang="en-US" sz="1200" dirty="0"/>
+          </a:p>
+          <a:p>
+            <a:endParaRPr lang="en-US" sz="1200" dirty="0"/>
+          </a:p>
+          <a:p>
+            <a:endParaRPr lang="en-US" sz="1200" dirty="0"/>
+          </a:p>
+          <a:p>
+            <a:endParaRPr lang="en-US" sz="1200" dirty="0"/>
+          </a:p>
+          <a:p>
+            <a:endParaRPr lang="en-US" sz="1200" dirty="0"/>
+          </a:p>
+          <a:p>
+            <a:endParaRPr lang="en-US" sz="1200" dirty="0"/>
+          </a:p>
+          <a:p>
+            <a:endParaRPr lang="en-US" sz="1200" dirty="0"/>
+          </a:p>
+          <a:p>
+            <a:endParaRPr lang="en-US" sz="1200" dirty="0"/>
+          </a:p>
+          <a:p>
+            <a:endParaRPr lang="en-US" sz="1200" dirty="0"/>
+          </a:p>
+        </p:txBody>
+      </p:sp>
+      <p:cxnSp>
+        <p:nvCxnSpPr>
+          <p:cNvPr id="8" name="Straight Connector 7">
+            <a:extLst>
+              <a:ext uri="{FF2B5EF4-FFF2-40B4-BE49-F238E27FC236}">
+                <a16:creationId xmlns:a16="http://schemas.microsoft.com/office/drawing/2014/main" id="{B68E5CBF-9A25-C343-371C-5A3EF2A7C7A7}"/>
+              </a:ext>
+            </a:extLst>
+          </p:cNvPr>
+          <p:cNvCxnSpPr/>
+          <p:nvPr/>
+        </p:nvCxnSpPr>
+        <p:spPr>
+          <a:xfrm flipV="1">
+            <a:off x="2081524" y="1539317"/>
+            <a:ext cx="2086118" cy="45949"/>
+          </a:xfrm>
+          <a:prstGeom prst="line">
+            <a:avLst/>
+          </a:prstGeom>
+        </p:spPr>
+        <p:style>
+          <a:lnRef idx="2">
+            <a:schemeClr val="accent1"/>
+          </a:lnRef>
+          <a:fillRef idx="0">
+            <a:schemeClr val="accent1"/>
+          </a:fillRef>
+          <a:effectRef idx="1">
+            <a:schemeClr val="accent1"/>
+          </a:effectRef>
+          <a:fontRef idx="minor">
+            <a:schemeClr val="tx1"/>
+          </a:fontRef>
+        </p:style>
+      </p:cxnSp>
+      <p:cxnSp>
+        <p:nvCxnSpPr>
+          <p:cNvPr id="10" name="Straight Connector 9">
+            <a:extLst>
+              <a:ext uri="{FF2B5EF4-FFF2-40B4-BE49-F238E27FC236}">
+                <a16:creationId xmlns:a16="http://schemas.microsoft.com/office/drawing/2014/main" id="{95856014-9648-899A-9B49-764D4B607B04}"/>
+              </a:ext>
+            </a:extLst>
+          </p:cNvPr>
+          <p:cNvCxnSpPr/>
+          <p:nvPr/>
+        </p:nvCxnSpPr>
+        <p:spPr>
+          <a:xfrm flipV="1">
+            <a:off x="1815015" y="1865560"/>
+            <a:ext cx="2352627" cy="87304"/>
+          </a:xfrm>
+          <a:prstGeom prst="line">
+            <a:avLst/>
+          </a:prstGeom>
+        </p:spPr>
+        <p:style>
+          <a:lnRef idx="2">
+            <a:schemeClr val="accent1"/>
+          </a:lnRef>
+          <a:fillRef idx="0">
+            <a:schemeClr val="accent1"/>
+          </a:fillRef>
+          <a:effectRef idx="1">
+            <a:schemeClr val="accent1"/>
+          </a:effectRef>
+          <a:fontRef idx="minor">
+            <a:schemeClr val="tx1"/>
+          </a:fontRef>
+        </p:style>
+      </p:cxnSp>
+      <p:cxnSp>
+        <p:nvCxnSpPr>
+          <p:cNvPr id="12" name="Straight Connector 11">
+            <a:extLst>
+              <a:ext uri="{FF2B5EF4-FFF2-40B4-BE49-F238E27FC236}">
+                <a16:creationId xmlns:a16="http://schemas.microsoft.com/office/drawing/2014/main" id="{CD2B18E2-7308-D1F2-F6ED-7E6FD2D1ECC2}"/>
+              </a:ext>
+            </a:extLst>
+          </p:cNvPr>
+          <p:cNvCxnSpPr/>
+          <p:nvPr/>
+        </p:nvCxnSpPr>
+        <p:spPr>
+          <a:xfrm flipV="1">
+            <a:off x="1815015" y="2205588"/>
+            <a:ext cx="2246943" cy="87304"/>
+          </a:xfrm>
+          <a:prstGeom prst="line">
+            <a:avLst/>
+          </a:prstGeom>
+        </p:spPr>
+        <p:style>
+          <a:lnRef idx="2">
+            <a:schemeClr val="accent1"/>
+          </a:lnRef>
+          <a:fillRef idx="0">
+            <a:schemeClr val="accent1"/>
+          </a:fillRef>
+          <a:effectRef idx="1">
+            <a:schemeClr val="accent1"/>
+          </a:effectRef>
+          <a:fontRef idx="minor">
+            <a:schemeClr val="tx1"/>
+          </a:fontRef>
+        </p:style>
+      </p:cxnSp>
+      <p:cxnSp>
+        <p:nvCxnSpPr>
+          <p:cNvPr id="14" name="Straight Connector 13">
+            <a:extLst>
+              <a:ext uri="{FF2B5EF4-FFF2-40B4-BE49-F238E27FC236}">
+                <a16:creationId xmlns:a16="http://schemas.microsoft.com/office/drawing/2014/main" id="{C0A0047B-E8FA-39C6-3A13-60CDBE4DE0FB}"/>
+              </a:ext>
+            </a:extLst>
+          </p:cNvPr>
+          <p:cNvCxnSpPr>
+            <a:cxnSpLocks/>
+          </p:cNvCxnSpPr>
+          <p:nvPr/>
+        </p:nvCxnSpPr>
+        <p:spPr>
+          <a:xfrm>
+            <a:off x="2398577" y="3262432"/>
+            <a:ext cx="1769065" cy="0"/>
+          </a:xfrm>
+          <a:prstGeom prst="line">
+            <a:avLst/>
+          </a:prstGeom>
+        </p:spPr>
+        <p:style>
+          <a:lnRef idx="2">
+            <a:schemeClr val="accent1"/>
+          </a:lnRef>
+          <a:fillRef idx="0">
+            <a:schemeClr val="accent1"/>
+          </a:fillRef>
+          <a:effectRef idx="1">
+            <a:schemeClr val="accent1"/>
+          </a:effectRef>
+          <a:fontRef idx="minor">
+            <a:schemeClr val="tx1"/>
+          </a:fontRef>
+        </p:style>
+      </p:cxnSp>
+      <p:pic>
+        <p:nvPicPr>
+          <p:cNvPr id="17" name="Picture 16">
+            <a:extLst>
+              <a:ext uri="{FF2B5EF4-FFF2-40B4-BE49-F238E27FC236}">
+                <a16:creationId xmlns:a16="http://schemas.microsoft.com/office/drawing/2014/main" id="{2E04A68E-328E-7FF3-3134-168D4A225927}"/>
+              </a:ext>
+            </a:extLst>
+          </p:cNvPr>
+          <p:cNvPicPr>
+            <a:picLocks noChangeAspect="1"/>
+          </p:cNvPicPr>
+          <p:nvPr/>
+        </p:nvPicPr>
+        <p:blipFill>
+          <a:blip r:embed="rId3"/>
+          <a:stretch>
+            <a:fillRect/>
+          </a:stretch>
+        </p:blipFill>
+        <p:spPr>
+          <a:xfrm>
+            <a:off x="7087042" y="1280398"/>
+            <a:ext cx="2598484" cy="3653909"/>
+          </a:xfrm>
+          <a:prstGeom prst="rect">
+            <a:avLst/>
+          </a:prstGeom>
+        </p:spPr>
+      </p:pic>
+      <p:sp>
+        <p:nvSpPr>
+          <p:cNvPr id="18" name="Rectangle 17">
+            <a:extLst>
+              <a:ext uri="{FF2B5EF4-FFF2-40B4-BE49-F238E27FC236}">
+                <a16:creationId xmlns:a16="http://schemas.microsoft.com/office/drawing/2014/main" id="{9E94823B-BDAA-AFC0-46FE-E0E501402649}"/>
+              </a:ext>
+            </a:extLst>
+          </p:cNvPr>
+          <p:cNvSpPr/>
+          <p:nvPr/>
+        </p:nvSpPr>
+        <p:spPr>
+          <a:xfrm>
+            <a:off x="7126806" y="3685170"/>
+            <a:ext cx="2320462" cy="1130364"/>
+          </a:xfrm>
+          <a:prstGeom prst="rect">
+            <a:avLst/>
+          </a:prstGeom>
+          <a:solidFill>
+            <a:schemeClr val="accent1">
+              <a:alpha val="56000"/>
+            </a:schemeClr>
+          </a:solidFill>
+          <a:effectLst>
+            <a:outerShdw blurRad="50800" dist="50800" dir="5400000" algn="ctr" rotWithShape="0">
+              <a:srgbClr val="000000">
+                <a:alpha val="0"/>
+              </a:srgbClr>
+            </a:outerShdw>
+          </a:effectLst>
+        </p:spPr>
+        <p:style>
+          <a:lnRef idx="2">
+            <a:schemeClr val="accent1">
+              <a:shade val="15000"/>
+            </a:schemeClr>
+          </a:lnRef>
+          <a:fillRef idx="1">
+            <a:schemeClr val="accent1"/>
+          </a:fillRef>
+          <a:effectRef idx="0">
+            <a:schemeClr val="accent1"/>
+          </a:effectRef>
+          <a:fontRef idx="minor">
+            <a:schemeClr val="lt1"/>
+          </a:fontRef>
+        </p:style>
+        <p:txBody>
+          <a:bodyPr rtlCol="0" anchor="ctr"/>
+          <a:lstStyle/>
+          <a:p>
+            <a:pPr algn="ctr"/>
+            <a:r>
+              <a:rPr lang="en-US" dirty="0"/>
+              <a:t>Delete these links</a:t>
+            </a:r>
+          </a:p>
+        </p:txBody>
+      </p:sp>
+      <p:sp>
+        <p:nvSpPr>
+          <p:cNvPr id="19" name="TextBox 18">
+            <a:extLst>
+              <a:ext uri="{FF2B5EF4-FFF2-40B4-BE49-F238E27FC236}">
+                <a16:creationId xmlns:a16="http://schemas.microsoft.com/office/drawing/2014/main" id="{46F39655-5E6F-139B-807A-C1B3932D6647}"/>
+              </a:ext>
+            </a:extLst>
+          </p:cNvPr>
+          <p:cNvSpPr txBox="1"/>
+          <p:nvPr/>
+        </p:nvSpPr>
+        <p:spPr>
+          <a:xfrm>
+            <a:off x="9979945" y="3000212"/>
+            <a:ext cx="1792040" cy="338554"/>
+          </a:xfrm>
+          <a:prstGeom prst="rect">
+            <a:avLst/>
+          </a:prstGeom>
+          <a:solidFill>
+            <a:schemeClr val="accent1">
+              <a:lumMod val="20000"/>
+              <a:lumOff val="80000"/>
+            </a:schemeClr>
+          </a:solidFill>
+        </p:spPr>
+        <p:txBody>
+          <a:bodyPr wrap="square" rtlCol="0">
+            <a:spAutoFit/>
+          </a:bodyPr>
+          <a:lstStyle/>
+          <a:p>
+            <a:r>
+              <a:rPr lang="en-US" sz="800" dirty="0"/>
+              <a:t>Keep the research header Empty on next iteration</a:t>
+            </a:r>
+          </a:p>
+        </p:txBody>
+      </p:sp>
+      <p:cxnSp>
+        <p:nvCxnSpPr>
+          <p:cNvPr id="21" name="Straight Connector 20">
+            <a:extLst>
+              <a:ext uri="{FF2B5EF4-FFF2-40B4-BE49-F238E27FC236}">
+                <a16:creationId xmlns:a16="http://schemas.microsoft.com/office/drawing/2014/main" id="{0719EE29-6BA9-91A6-0CE9-5DC18D2DC2B0}"/>
+              </a:ext>
+            </a:extLst>
+          </p:cNvPr>
+          <p:cNvCxnSpPr>
+            <a:cxnSpLocks/>
+            <a:endCxn id="19" idx="1"/>
+          </p:cNvCxnSpPr>
+          <p:nvPr/>
+        </p:nvCxnSpPr>
+        <p:spPr>
+          <a:xfrm flipV="1">
+            <a:off x="7370340" y="3169489"/>
+            <a:ext cx="2609605" cy="455946"/>
+          </a:xfrm>
+          <a:prstGeom prst="line">
+            <a:avLst/>
+          </a:prstGeom>
+        </p:spPr>
+        <p:style>
+          <a:lnRef idx="2">
+            <a:schemeClr val="accent1"/>
+          </a:lnRef>
+          <a:fillRef idx="0">
+            <a:schemeClr val="accent1"/>
+          </a:fillRef>
+          <a:effectRef idx="1">
+            <a:schemeClr val="accent1"/>
+          </a:effectRef>
+          <a:fontRef idx="minor">
+            <a:schemeClr val="tx1"/>
+          </a:fontRef>
+        </p:style>
+      </p:cxnSp>
+      <p:sp>
+        <p:nvSpPr>
+          <p:cNvPr id="2" name="Title 1">
+            <a:extLst>
+              <a:ext uri="{FF2B5EF4-FFF2-40B4-BE49-F238E27FC236}">
+                <a16:creationId xmlns:a16="http://schemas.microsoft.com/office/drawing/2014/main" id="{E586C658-DB69-7527-6CD8-FEB998C89F94}"/>
+              </a:ext>
+            </a:extLst>
+          </p:cNvPr>
+          <p:cNvSpPr>
+            <a:spLocks noGrp="1"/>
+          </p:cNvSpPr>
+          <p:nvPr>
+            <p:ph type="title"/>
+          </p:nvPr>
+        </p:nvSpPr>
+        <p:spPr>
+          <a:xfrm>
+            <a:off x="125979" y="190643"/>
+            <a:ext cx="10515600" cy="491922"/>
+          </a:xfrm>
+        </p:spPr>
+        <p:txBody>
+          <a:bodyPr>
+            <a:normAutofit fontScale="90000"/>
+          </a:bodyPr>
+          <a:lstStyle/>
+          <a:p>
+            <a:r>
+              <a:rPr lang="en-US" dirty="0"/>
+              <a:t>Facility </a:t>
+            </a:r>
+          </a:p>
+        </p:txBody>
+      </p:sp>
+      <p:sp>
+        <p:nvSpPr>
+          <p:cNvPr id="3" name="Rectangle 2">
+            <a:extLst>
+              <a:ext uri="{FF2B5EF4-FFF2-40B4-BE49-F238E27FC236}">
+                <a16:creationId xmlns:a16="http://schemas.microsoft.com/office/drawing/2014/main" id="{27A0F549-428B-4F0C-950C-E161495CF8B6}"/>
+              </a:ext>
+            </a:extLst>
+          </p:cNvPr>
+          <p:cNvSpPr/>
+          <p:nvPr/>
+        </p:nvSpPr>
+        <p:spPr>
+          <a:xfrm>
+            <a:off x="358408" y="5155562"/>
+            <a:ext cx="3574890" cy="1516342"/>
+          </a:xfrm>
+          <a:prstGeom prst="rect">
+            <a:avLst/>
+          </a:prstGeom>
+        </p:spPr>
+        <p:style>
+          <a:lnRef idx="2">
+            <a:schemeClr val="accent1">
+              <a:shade val="15000"/>
+            </a:schemeClr>
+          </a:lnRef>
+          <a:fillRef idx="1">
+            <a:schemeClr val="accent1"/>
+          </a:fillRef>
+          <a:effectRef idx="0">
+            <a:schemeClr val="accent1"/>
+          </a:effectRef>
+          <a:fontRef idx="minor">
+            <a:schemeClr val="lt1"/>
+          </a:fontRef>
+        </p:style>
+        <p:txBody>
+          <a:bodyPr rtlCol="0" anchor="ctr"/>
+          <a:lstStyle/>
+          <a:p>
+            <a:pPr algn="ctr"/>
+            <a:r>
+              <a:rPr lang="en-US" dirty="0"/>
+              <a:t>Research coming</a:t>
+            </a:r>
+          </a:p>
+        </p:txBody>
+      </p:sp>
+    </p:spTree>
+    <p:extLst>
+      <p:ext uri="{BB962C8B-B14F-4D97-AF65-F5344CB8AC3E}">
+        <p14:creationId xmlns:p14="http://schemas.microsoft.com/office/powerpoint/2010/main" val="2599954293"/>
       </p:ext>
     </p:extLst>
   </p:cSld>
